--- a/I BELIEVE  我相信.pptx
+++ b/I BELIEVE  我相信.pptx
@@ -158,7 +158,7 @@
           <a:lstStyle/>
           <a:p>
             <a:r>
-              <a:rPr lang="en-US" altLang="zh-TW" smtClean="0"/>
+              <a:rPr lang="en-US" altLang="zh-TW"/>
               <a:t>Click to edit Master title style</a:t>
             </a:r>
             <a:endParaRPr lang="zh-TW" altLang="en-US"/>
@@ -277,7 +277,7 @@
           </a:lstStyle>
           <a:p>
             <a:r>
-              <a:rPr lang="en-US" altLang="zh-TW" smtClean="0"/>
+              <a:rPr lang="en-US" altLang="zh-TW"/>
               <a:t>Click to edit Master subtitle style</a:t>
             </a:r>
             <a:endParaRPr lang="zh-TW" altLang="en-US"/>
@@ -301,7 +301,7 @@
           <a:p>
             <a:fld id="{090CCC6F-0312-4C40-BA63-6262FD2D39CE}" type="datetimeFigureOut">
               <a:rPr lang="vi-VN" smtClean="0"/>
-              <a:t>07/11/2020</a:t>
+              <a:t>23/10/2025</a:t>
             </a:fld>
             <a:endParaRPr lang="vi-VN"/>
           </a:p>
@@ -395,7 +395,7 @@
           <a:lstStyle/>
           <a:p>
             <a:r>
-              <a:rPr lang="en-US" altLang="zh-TW" smtClean="0"/>
+              <a:rPr lang="en-US" altLang="zh-TW"/>
               <a:t>Click to edit Master title style</a:t>
             </a:r>
             <a:endParaRPr lang="zh-TW" altLang="en-US"/>
@@ -419,35 +419,35 @@
           <a:p>
             <a:pPr lvl="0"/>
             <a:r>
-              <a:rPr lang="en-US" altLang="zh-TW" smtClean="0"/>
+              <a:rPr lang="en-US" altLang="zh-TW"/>
               <a:t>Edit Master text styles</a:t>
             </a:r>
           </a:p>
           <a:p>
             <a:pPr lvl="1"/>
             <a:r>
-              <a:rPr lang="en-US" altLang="zh-TW" smtClean="0"/>
+              <a:rPr lang="en-US" altLang="zh-TW"/>
               <a:t>Second level</a:t>
             </a:r>
           </a:p>
           <a:p>
             <a:pPr lvl="2"/>
             <a:r>
-              <a:rPr lang="en-US" altLang="zh-TW" smtClean="0"/>
+              <a:rPr lang="en-US" altLang="zh-TW"/>
               <a:t>Third level</a:t>
             </a:r>
           </a:p>
           <a:p>
             <a:pPr lvl="3"/>
             <a:r>
-              <a:rPr lang="en-US" altLang="zh-TW" smtClean="0"/>
+              <a:rPr lang="en-US" altLang="zh-TW"/>
               <a:t>Fourth level</a:t>
             </a:r>
           </a:p>
           <a:p>
             <a:pPr lvl="4"/>
             <a:r>
-              <a:rPr lang="en-US" altLang="zh-TW" smtClean="0"/>
+              <a:rPr lang="en-US" altLang="zh-TW"/>
               <a:t>Fifth level</a:t>
             </a:r>
             <a:endParaRPr lang="zh-TW" altLang="en-US"/>
@@ -471,7 +471,7 @@
           <a:p>
             <a:fld id="{090CCC6F-0312-4C40-BA63-6262FD2D39CE}" type="datetimeFigureOut">
               <a:rPr lang="vi-VN" smtClean="0"/>
-              <a:t>07/11/2020</a:t>
+              <a:t>23/10/2025</a:t>
             </a:fld>
             <a:endParaRPr lang="vi-VN"/>
           </a:p>
@@ -570,7 +570,7 @@
           <a:lstStyle/>
           <a:p>
             <a:r>
-              <a:rPr lang="en-US" altLang="zh-TW" smtClean="0"/>
+              <a:rPr lang="en-US" altLang="zh-TW"/>
               <a:t>Click to edit Master title style</a:t>
             </a:r>
             <a:endParaRPr lang="zh-TW" altLang="en-US"/>
@@ -599,35 +599,35 @@
           <a:p>
             <a:pPr lvl="0"/>
             <a:r>
-              <a:rPr lang="en-US" altLang="zh-TW" smtClean="0"/>
+              <a:rPr lang="en-US" altLang="zh-TW"/>
               <a:t>Edit Master text styles</a:t>
             </a:r>
           </a:p>
           <a:p>
             <a:pPr lvl="1"/>
             <a:r>
-              <a:rPr lang="en-US" altLang="zh-TW" smtClean="0"/>
+              <a:rPr lang="en-US" altLang="zh-TW"/>
               <a:t>Second level</a:t>
             </a:r>
           </a:p>
           <a:p>
             <a:pPr lvl="2"/>
             <a:r>
-              <a:rPr lang="en-US" altLang="zh-TW" smtClean="0"/>
+              <a:rPr lang="en-US" altLang="zh-TW"/>
               <a:t>Third level</a:t>
             </a:r>
           </a:p>
           <a:p>
             <a:pPr lvl="3"/>
             <a:r>
-              <a:rPr lang="en-US" altLang="zh-TW" smtClean="0"/>
+              <a:rPr lang="en-US" altLang="zh-TW"/>
               <a:t>Fourth level</a:t>
             </a:r>
           </a:p>
           <a:p>
             <a:pPr lvl="4"/>
             <a:r>
-              <a:rPr lang="en-US" altLang="zh-TW" smtClean="0"/>
+              <a:rPr lang="en-US" altLang="zh-TW"/>
               <a:t>Fifth level</a:t>
             </a:r>
             <a:endParaRPr lang="zh-TW" altLang="en-US"/>
@@ -651,7 +651,7 @@
           <a:p>
             <a:fld id="{090CCC6F-0312-4C40-BA63-6262FD2D39CE}" type="datetimeFigureOut">
               <a:rPr lang="vi-VN" smtClean="0"/>
-              <a:t>07/11/2020</a:t>
+              <a:t>23/10/2025</a:t>
             </a:fld>
             <a:endParaRPr lang="vi-VN"/>
           </a:p>
@@ -745,7 +745,7 @@
           <a:lstStyle/>
           <a:p>
             <a:r>
-              <a:rPr lang="en-US" altLang="zh-TW" smtClean="0"/>
+              <a:rPr lang="en-US" altLang="zh-TW"/>
               <a:t>Click to edit Master title style</a:t>
             </a:r>
             <a:endParaRPr lang="zh-TW" altLang="en-US"/>
@@ -769,35 +769,35 @@
           <a:p>
             <a:pPr lvl="0"/>
             <a:r>
-              <a:rPr lang="en-US" altLang="zh-TW" smtClean="0"/>
+              <a:rPr lang="en-US" altLang="zh-TW"/>
               <a:t>Edit Master text styles</a:t>
             </a:r>
           </a:p>
           <a:p>
             <a:pPr lvl="1"/>
             <a:r>
-              <a:rPr lang="en-US" altLang="zh-TW" smtClean="0"/>
+              <a:rPr lang="en-US" altLang="zh-TW"/>
               <a:t>Second level</a:t>
             </a:r>
           </a:p>
           <a:p>
             <a:pPr lvl="2"/>
             <a:r>
-              <a:rPr lang="en-US" altLang="zh-TW" smtClean="0"/>
+              <a:rPr lang="en-US" altLang="zh-TW"/>
               <a:t>Third level</a:t>
             </a:r>
           </a:p>
           <a:p>
             <a:pPr lvl="3"/>
             <a:r>
-              <a:rPr lang="en-US" altLang="zh-TW" smtClean="0"/>
+              <a:rPr lang="en-US" altLang="zh-TW"/>
               <a:t>Fourth level</a:t>
             </a:r>
           </a:p>
           <a:p>
             <a:pPr lvl="4"/>
             <a:r>
-              <a:rPr lang="en-US" altLang="zh-TW" smtClean="0"/>
+              <a:rPr lang="en-US" altLang="zh-TW"/>
               <a:t>Fifth level</a:t>
             </a:r>
             <a:endParaRPr lang="zh-TW" altLang="en-US"/>
@@ -821,7 +821,7 @@
           <a:p>
             <a:fld id="{090CCC6F-0312-4C40-BA63-6262FD2D39CE}" type="datetimeFigureOut">
               <a:rPr lang="vi-VN" smtClean="0"/>
-              <a:t>07/11/2020</a:t>
+              <a:t>23/10/2025</a:t>
             </a:fld>
             <a:endParaRPr lang="vi-VN"/>
           </a:p>
@@ -924,7 +924,7 @@
           </a:lstStyle>
           <a:p>
             <a:r>
-              <a:rPr lang="en-US" altLang="zh-TW" smtClean="0"/>
+              <a:rPr lang="en-US" altLang="zh-TW"/>
               <a:t>Click to edit Master title style</a:t>
             </a:r>
             <a:endParaRPr lang="zh-TW" altLang="en-US"/>
@@ -1044,7 +1044,7 @@
           <a:p>
             <a:pPr lvl="0"/>
             <a:r>
-              <a:rPr lang="en-US" altLang="zh-TW" smtClean="0"/>
+              <a:rPr lang="en-US" altLang="zh-TW"/>
               <a:t>Edit Master text styles</a:t>
             </a:r>
           </a:p>
@@ -1067,7 +1067,7 @@
           <a:p>
             <a:fld id="{090CCC6F-0312-4C40-BA63-6262FD2D39CE}" type="datetimeFigureOut">
               <a:rPr lang="vi-VN" smtClean="0"/>
-              <a:t>07/11/2020</a:t>
+              <a:t>23/10/2025</a:t>
             </a:fld>
             <a:endParaRPr lang="vi-VN"/>
           </a:p>
@@ -1161,7 +1161,7 @@
           <a:lstStyle/>
           <a:p>
             <a:r>
-              <a:rPr lang="en-US" altLang="zh-TW" smtClean="0"/>
+              <a:rPr lang="en-US" altLang="zh-TW"/>
               <a:t>Click to edit Master title style</a:t>
             </a:r>
             <a:endParaRPr lang="zh-TW" altLang="en-US"/>
@@ -1218,35 +1218,35 @@
           <a:p>
             <a:pPr lvl="0"/>
             <a:r>
-              <a:rPr lang="en-US" altLang="zh-TW" smtClean="0"/>
+              <a:rPr lang="en-US" altLang="zh-TW"/>
               <a:t>Edit Master text styles</a:t>
             </a:r>
           </a:p>
           <a:p>
             <a:pPr lvl="1"/>
             <a:r>
-              <a:rPr lang="en-US" altLang="zh-TW" smtClean="0"/>
+              <a:rPr lang="en-US" altLang="zh-TW"/>
               <a:t>Second level</a:t>
             </a:r>
           </a:p>
           <a:p>
             <a:pPr lvl="2"/>
             <a:r>
-              <a:rPr lang="en-US" altLang="zh-TW" smtClean="0"/>
+              <a:rPr lang="en-US" altLang="zh-TW"/>
               <a:t>Third level</a:t>
             </a:r>
           </a:p>
           <a:p>
             <a:pPr lvl="3"/>
             <a:r>
-              <a:rPr lang="en-US" altLang="zh-TW" smtClean="0"/>
+              <a:rPr lang="en-US" altLang="zh-TW"/>
               <a:t>Fourth level</a:t>
             </a:r>
           </a:p>
           <a:p>
             <a:pPr lvl="4"/>
             <a:r>
-              <a:rPr lang="en-US" altLang="zh-TW" smtClean="0"/>
+              <a:rPr lang="en-US" altLang="zh-TW"/>
               <a:t>Fifth level</a:t>
             </a:r>
             <a:endParaRPr lang="zh-TW" altLang="en-US"/>
@@ -1303,35 +1303,35 @@
           <a:p>
             <a:pPr lvl="0"/>
             <a:r>
-              <a:rPr lang="en-US" altLang="zh-TW" smtClean="0"/>
+              <a:rPr lang="en-US" altLang="zh-TW"/>
               <a:t>Edit Master text styles</a:t>
             </a:r>
           </a:p>
           <a:p>
             <a:pPr lvl="1"/>
             <a:r>
-              <a:rPr lang="en-US" altLang="zh-TW" smtClean="0"/>
+              <a:rPr lang="en-US" altLang="zh-TW"/>
               <a:t>Second level</a:t>
             </a:r>
           </a:p>
           <a:p>
             <a:pPr lvl="2"/>
             <a:r>
-              <a:rPr lang="en-US" altLang="zh-TW" smtClean="0"/>
+              <a:rPr lang="en-US" altLang="zh-TW"/>
               <a:t>Third level</a:t>
             </a:r>
           </a:p>
           <a:p>
             <a:pPr lvl="3"/>
             <a:r>
-              <a:rPr lang="en-US" altLang="zh-TW" smtClean="0"/>
+              <a:rPr lang="en-US" altLang="zh-TW"/>
               <a:t>Fourth level</a:t>
             </a:r>
           </a:p>
           <a:p>
             <a:pPr lvl="4"/>
             <a:r>
-              <a:rPr lang="en-US" altLang="zh-TW" smtClean="0"/>
+              <a:rPr lang="en-US" altLang="zh-TW"/>
               <a:t>Fifth level</a:t>
             </a:r>
             <a:endParaRPr lang="zh-TW" altLang="en-US"/>
@@ -1355,7 +1355,7 @@
           <a:p>
             <a:fld id="{090CCC6F-0312-4C40-BA63-6262FD2D39CE}" type="datetimeFigureOut">
               <a:rPr lang="vi-VN" smtClean="0"/>
-              <a:t>07/11/2020</a:t>
+              <a:t>23/10/2025</a:t>
             </a:fld>
             <a:endParaRPr lang="vi-VN"/>
           </a:p>
@@ -1453,7 +1453,7 @@
           </a:lstStyle>
           <a:p>
             <a:r>
-              <a:rPr lang="en-US" altLang="zh-TW" smtClean="0"/>
+              <a:rPr lang="en-US" altLang="zh-TW"/>
               <a:t>Click to edit Master title style</a:t>
             </a:r>
             <a:endParaRPr lang="zh-TW" altLang="en-US"/>
@@ -1519,7 +1519,7 @@
           <a:p>
             <a:pPr lvl="0"/>
             <a:r>
-              <a:rPr lang="en-US" altLang="zh-TW" smtClean="0"/>
+              <a:rPr lang="en-US" altLang="zh-TW"/>
               <a:t>Edit Master text styles</a:t>
             </a:r>
           </a:p>
@@ -1575,35 +1575,35 @@
           <a:p>
             <a:pPr lvl="0"/>
             <a:r>
-              <a:rPr lang="en-US" altLang="zh-TW" smtClean="0"/>
+              <a:rPr lang="en-US" altLang="zh-TW"/>
               <a:t>Edit Master text styles</a:t>
             </a:r>
           </a:p>
           <a:p>
             <a:pPr lvl="1"/>
             <a:r>
-              <a:rPr lang="en-US" altLang="zh-TW" smtClean="0"/>
+              <a:rPr lang="en-US" altLang="zh-TW"/>
               <a:t>Second level</a:t>
             </a:r>
           </a:p>
           <a:p>
             <a:pPr lvl="2"/>
             <a:r>
-              <a:rPr lang="en-US" altLang="zh-TW" smtClean="0"/>
+              <a:rPr lang="en-US" altLang="zh-TW"/>
               <a:t>Third level</a:t>
             </a:r>
           </a:p>
           <a:p>
             <a:pPr lvl="3"/>
             <a:r>
-              <a:rPr lang="en-US" altLang="zh-TW" smtClean="0"/>
+              <a:rPr lang="en-US" altLang="zh-TW"/>
               <a:t>Fourth level</a:t>
             </a:r>
           </a:p>
           <a:p>
             <a:pPr lvl="4"/>
             <a:r>
-              <a:rPr lang="en-US" altLang="zh-TW" smtClean="0"/>
+              <a:rPr lang="en-US" altLang="zh-TW"/>
               <a:t>Fifth level</a:t>
             </a:r>
             <a:endParaRPr lang="zh-TW" altLang="en-US"/>
@@ -1669,7 +1669,7 @@
           <a:p>
             <a:pPr lvl="0"/>
             <a:r>
-              <a:rPr lang="en-US" altLang="zh-TW" smtClean="0"/>
+              <a:rPr lang="en-US" altLang="zh-TW"/>
               <a:t>Edit Master text styles</a:t>
             </a:r>
           </a:p>
@@ -1725,35 +1725,35 @@
           <a:p>
             <a:pPr lvl="0"/>
             <a:r>
-              <a:rPr lang="en-US" altLang="zh-TW" smtClean="0"/>
+              <a:rPr lang="en-US" altLang="zh-TW"/>
               <a:t>Edit Master text styles</a:t>
             </a:r>
           </a:p>
           <a:p>
             <a:pPr lvl="1"/>
             <a:r>
-              <a:rPr lang="en-US" altLang="zh-TW" smtClean="0"/>
+              <a:rPr lang="en-US" altLang="zh-TW"/>
               <a:t>Second level</a:t>
             </a:r>
           </a:p>
           <a:p>
             <a:pPr lvl="2"/>
             <a:r>
-              <a:rPr lang="en-US" altLang="zh-TW" smtClean="0"/>
+              <a:rPr lang="en-US" altLang="zh-TW"/>
               <a:t>Third level</a:t>
             </a:r>
           </a:p>
           <a:p>
             <a:pPr lvl="3"/>
             <a:r>
-              <a:rPr lang="en-US" altLang="zh-TW" smtClean="0"/>
+              <a:rPr lang="en-US" altLang="zh-TW"/>
               <a:t>Fourth level</a:t>
             </a:r>
           </a:p>
           <a:p>
             <a:pPr lvl="4"/>
             <a:r>
-              <a:rPr lang="en-US" altLang="zh-TW" smtClean="0"/>
+              <a:rPr lang="en-US" altLang="zh-TW"/>
               <a:t>Fifth level</a:t>
             </a:r>
             <a:endParaRPr lang="zh-TW" altLang="en-US"/>
@@ -1777,7 +1777,7 @@
           <a:p>
             <a:fld id="{090CCC6F-0312-4C40-BA63-6262FD2D39CE}" type="datetimeFigureOut">
               <a:rPr lang="vi-VN" smtClean="0"/>
-              <a:t>07/11/2020</a:t>
+              <a:t>23/10/2025</a:t>
             </a:fld>
             <a:endParaRPr lang="vi-VN"/>
           </a:p>
@@ -1871,7 +1871,7 @@
           <a:lstStyle/>
           <a:p>
             <a:r>
-              <a:rPr lang="en-US" altLang="zh-TW" smtClean="0"/>
+              <a:rPr lang="en-US" altLang="zh-TW"/>
               <a:t>Click to edit Master title style</a:t>
             </a:r>
             <a:endParaRPr lang="zh-TW" altLang="en-US"/>
@@ -1895,7 +1895,7 @@
           <a:p>
             <a:fld id="{090CCC6F-0312-4C40-BA63-6262FD2D39CE}" type="datetimeFigureOut">
               <a:rPr lang="vi-VN" smtClean="0"/>
-              <a:t>07/11/2020</a:t>
+              <a:t>23/10/2025</a:t>
             </a:fld>
             <a:endParaRPr lang="vi-VN"/>
           </a:p>
@@ -1990,7 +1990,7 @@
           <a:p>
             <a:fld id="{090CCC6F-0312-4C40-BA63-6262FD2D39CE}" type="datetimeFigureOut">
               <a:rPr lang="vi-VN" smtClean="0"/>
-              <a:t>07/11/2020</a:t>
+              <a:t>23/10/2025</a:t>
             </a:fld>
             <a:endParaRPr lang="vi-VN"/>
           </a:p>
@@ -2093,7 +2093,7 @@
           </a:lstStyle>
           <a:p>
             <a:r>
-              <a:rPr lang="en-US" altLang="zh-TW" smtClean="0"/>
+              <a:rPr lang="en-US" altLang="zh-TW"/>
               <a:t>Click to edit Master title style</a:t>
             </a:r>
             <a:endParaRPr lang="zh-TW" altLang="en-US"/>
@@ -2150,35 +2150,35 @@
           <a:p>
             <a:pPr lvl="0"/>
             <a:r>
-              <a:rPr lang="en-US" altLang="zh-TW" smtClean="0"/>
+              <a:rPr lang="en-US" altLang="zh-TW"/>
               <a:t>Edit Master text styles</a:t>
             </a:r>
           </a:p>
           <a:p>
             <a:pPr lvl="1"/>
             <a:r>
-              <a:rPr lang="en-US" altLang="zh-TW" smtClean="0"/>
+              <a:rPr lang="en-US" altLang="zh-TW"/>
               <a:t>Second level</a:t>
             </a:r>
           </a:p>
           <a:p>
             <a:pPr lvl="2"/>
             <a:r>
-              <a:rPr lang="en-US" altLang="zh-TW" smtClean="0"/>
+              <a:rPr lang="en-US" altLang="zh-TW"/>
               <a:t>Third level</a:t>
             </a:r>
           </a:p>
           <a:p>
             <a:pPr lvl="3"/>
             <a:r>
-              <a:rPr lang="en-US" altLang="zh-TW" smtClean="0"/>
+              <a:rPr lang="en-US" altLang="zh-TW"/>
               <a:t>Fourth level</a:t>
             </a:r>
           </a:p>
           <a:p>
             <a:pPr lvl="4"/>
             <a:r>
-              <a:rPr lang="en-US" altLang="zh-TW" smtClean="0"/>
+              <a:rPr lang="en-US" altLang="zh-TW"/>
               <a:t>Fifth level</a:t>
             </a:r>
             <a:endParaRPr lang="zh-TW" altLang="en-US"/>
@@ -2244,7 +2244,7 @@
           <a:p>
             <a:pPr lvl="0"/>
             <a:r>
-              <a:rPr lang="en-US" altLang="zh-TW" smtClean="0"/>
+              <a:rPr lang="en-US" altLang="zh-TW"/>
               <a:t>Edit Master text styles</a:t>
             </a:r>
           </a:p>
@@ -2267,7 +2267,7 @@
           <a:p>
             <a:fld id="{090CCC6F-0312-4C40-BA63-6262FD2D39CE}" type="datetimeFigureOut">
               <a:rPr lang="vi-VN" smtClean="0"/>
-              <a:t>07/11/2020</a:t>
+              <a:t>23/10/2025</a:t>
             </a:fld>
             <a:endParaRPr lang="vi-VN"/>
           </a:p>
@@ -2370,7 +2370,7 @@
           </a:lstStyle>
           <a:p>
             <a:r>
-              <a:rPr lang="en-US" altLang="zh-TW" smtClean="0"/>
+              <a:rPr lang="en-US" altLang="zh-TW"/>
               <a:t>Click to edit Master title style</a:t>
             </a:r>
             <a:endParaRPr lang="zh-TW" altLang="en-US"/>
@@ -2435,7 +2435,7 @@
           </a:lstStyle>
           <a:p>
             <a:r>
-              <a:rPr lang="en-US" altLang="zh-TW" smtClean="0"/>
+              <a:rPr lang="en-US" altLang="zh-TW"/>
               <a:t>Click icon to add picture</a:t>
             </a:r>
             <a:endParaRPr lang="zh-TW" altLang="en-US"/>
@@ -2501,7 +2501,7 @@
           <a:p>
             <a:pPr lvl="0"/>
             <a:r>
-              <a:rPr lang="en-US" altLang="zh-TW" smtClean="0"/>
+              <a:rPr lang="en-US" altLang="zh-TW"/>
               <a:t>Edit Master text styles</a:t>
             </a:r>
           </a:p>
@@ -2524,7 +2524,7 @@
           <a:p>
             <a:fld id="{090CCC6F-0312-4C40-BA63-6262FD2D39CE}" type="datetimeFigureOut">
               <a:rPr lang="vi-VN" smtClean="0"/>
-              <a:t>07/11/2020</a:t>
+              <a:t>23/10/2025</a:t>
             </a:fld>
             <a:endParaRPr lang="vi-VN"/>
           </a:p>
@@ -2638,10 +2638,9 @@
           <a:lstStyle/>
           <a:p>
             <a:r>
-              <a:rPr lang="zh-TW" altLang="en-US" smtClean="0"/>
+              <a:rPr lang="zh-TW" altLang="en-US"/>
               <a:t>按一下以編輯母片標題樣式</a:t>
             </a:r>
-            <a:endParaRPr lang="zh-TW" altLang="en-US"/>
           </a:p>
         </p:txBody>
       </p:sp>
@@ -2672,38 +2671,37 @@
           <a:p>
             <a:pPr lvl="0"/>
             <a:r>
-              <a:rPr lang="zh-TW" altLang="en-US" smtClean="0"/>
+              <a:rPr lang="zh-TW" altLang="en-US"/>
               <a:t>按一下以編輯母片文字樣式</a:t>
             </a:r>
           </a:p>
           <a:p>
             <a:pPr lvl="1"/>
             <a:r>
-              <a:rPr lang="zh-TW" altLang="en-US" smtClean="0"/>
+              <a:rPr lang="zh-TW" altLang="en-US"/>
               <a:t>第二層</a:t>
             </a:r>
           </a:p>
           <a:p>
             <a:pPr lvl="2"/>
             <a:r>
-              <a:rPr lang="zh-TW" altLang="en-US" smtClean="0"/>
+              <a:rPr lang="zh-TW" altLang="en-US"/>
               <a:t>第三層</a:t>
             </a:r>
           </a:p>
           <a:p>
             <a:pPr lvl="3"/>
             <a:r>
-              <a:rPr lang="zh-TW" altLang="en-US" smtClean="0"/>
+              <a:rPr lang="zh-TW" altLang="en-US"/>
               <a:t>第四層</a:t>
             </a:r>
           </a:p>
           <a:p>
             <a:pPr lvl="4"/>
             <a:r>
-              <a:rPr lang="zh-TW" altLang="en-US" smtClean="0"/>
+              <a:rPr lang="zh-TW" altLang="en-US"/>
               <a:t>第五層</a:t>
             </a:r>
-            <a:endParaRPr lang="zh-TW" altLang="en-US"/>
           </a:p>
         </p:txBody>
       </p:sp>
@@ -2742,7 +2740,7 @@
           <a:p>
             <a:fld id="{090CCC6F-0312-4C40-BA63-6262FD2D39CE}" type="datetimeFigureOut">
               <a:rPr lang="vi-VN" smtClean="0"/>
-              <a:t>07/11/2020</a:t>
+              <a:t>23/10/2025</a:t>
             </a:fld>
             <a:endParaRPr lang="vi-VN"/>
           </a:p>
@@ -3140,7 +3138,7 @@
           <a:lstStyle/>
           <a:p>
             <a:r>
-              <a:rPr lang="vi-VN" b="1" i="1" dirty="0" smtClean="0">
+              <a:rPr lang="vi-VN" b="1" i="1" dirty="0">
                 <a:solidFill>
                   <a:srgbClr val="000066"/>
                 </a:solidFill>
@@ -3154,24 +3152,7 @@
                 <a:latin typeface="+mn-lt"/>
                 <a:ea typeface="微軟正黑體" pitchFamily="34" charset="-120"/>
               </a:rPr>
-              <a:t>I </a:t>
-            </a:r>
-            <a:r>
-              <a:rPr lang="vi-VN" b="1" i="1" dirty="0">
-                <a:solidFill>
-                  <a:srgbClr val="000066"/>
-                </a:solidFill>
-                <a:effectLst>
-                  <a:outerShdw blurRad="38100" dist="38100" dir="2700000" algn="tl">
-                    <a:srgbClr val="000000">
-                      <a:alpha val="43137"/>
-                    </a:srgbClr>
-                  </a:outerShdw>
-                </a:effectLst>
-                <a:latin typeface="+mn-lt"/>
-                <a:ea typeface="微軟正黑體" pitchFamily="34" charset="-120"/>
-              </a:rPr>
-              <a:t>BELIEVE </a:t>
+              <a:t>I BELIEVE </a:t>
             </a:r>
             <a:r>
               <a:rPr lang="zh-CN" altLang="en-US" sz="7200" b="1" i="1" dirty="0">
@@ -3188,24 +3169,7 @@
                 <a:latin typeface="微軟正黑體" pitchFamily="34" charset="-120"/>
                 <a:ea typeface="微軟正黑體" pitchFamily="34" charset="-120"/>
               </a:rPr>
-              <a:t>我</a:t>
-            </a:r>
-            <a:r>
-              <a:rPr lang="zh-CN" altLang="en-US" sz="7200" b="1" i="1" dirty="0">
-                <a:solidFill>
-                  <a:srgbClr val="000066"/>
-                </a:solidFill>
-                <a:effectLst>
-                  <a:outerShdw blurRad="38100" dist="38100" dir="2700000" algn="tl">
-                    <a:srgbClr val="000000">
-                      <a:alpha val="43137"/>
-                    </a:srgbClr>
-                  </a:outerShdw>
-                </a:effectLst>
-                <a:latin typeface="微軟正黑體" pitchFamily="34" charset="-120"/>
-                <a:ea typeface="微軟正黑體" pitchFamily="34" charset="-120"/>
-              </a:rPr>
-              <a:t>相信</a:t>
+              <a:t>我相信</a:t>
             </a:r>
             <a:endParaRPr lang="zh-TW" altLang="en-US" sz="7200" b="1" i="1" dirty="0">
               <a:solidFill>
@@ -3321,6 +3285,74 @@
           </a:p>
         </p:txBody>
       </p:sp>
+      <p:sp>
+        <p:nvSpPr>
+          <p:cNvPr id="2" name="TextBox 1">
+            <a:extLst>
+              <a:ext uri="{FF2B5EF4-FFF2-40B4-BE49-F238E27FC236}">
+                <a16:creationId xmlns:a16="http://schemas.microsoft.com/office/drawing/2014/main" id="{8158D069-D18E-8812-16E6-CC2E3748D8D8}"/>
+              </a:ext>
+            </a:extLst>
+          </p:cNvPr>
+          <p:cNvSpPr txBox="1"/>
+          <p:nvPr/>
+        </p:nvSpPr>
+        <p:spPr>
+          <a:xfrm>
+            <a:off x="0" y="5157192"/>
+            <a:ext cx="12192000" cy="666786"/>
+          </a:xfrm>
+          <a:prstGeom prst="rect">
+            <a:avLst/>
+          </a:prstGeom>
+          <a:noFill/>
+        </p:spPr>
+        <p:txBody>
+          <a:bodyPr wrap="square" rtlCol="0">
+            <a:spAutoFit/>
+          </a:bodyPr>
+          <a:lstStyle/>
+          <a:p>
+            <a:pPr algn="ctr"/>
+            <a:r>
+              <a:rPr lang="en-US" sz="3733" b="1" dirty="0">
+                <a:solidFill>
+                  <a:srgbClr val="000066"/>
+                </a:solidFill>
+                <a:latin typeface="Microsoft JhengHei" panose="020B0604030504040204" pitchFamily="34" charset="-120"/>
+                <a:ea typeface="Microsoft JhengHei" panose="020B0604030504040204" pitchFamily="34" charset="-120"/>
+              </a:rPr>
+              <a:t>( </a:t>
+            </a:r>
+            <a:r>
+              <a:rPr lang="zh-CN" altLang="en-US" sz="3733" b="1" dirty="0">
+                <a:solidFill>
+                  <a:srgbClr val="000066"/>
+                </a:solidFill>
+                <a:latin typeface="Microsoft JhengHei" panose="020B0604030504040204" pitchFamily="34" charset="-120"/>
+                <a:ea typeface="Microsoft JhengHei" panose="020B0604030504040204" pitchFamily="34" charset="-120"/>
+              </a:rPr>
+              <a:t>正歌</a:t>
+            </a:r>
+            <a:r>
+              <a:rPr lang="en-US" sz="3733" b="1" dirty="0">
+                <a:solidFill>
+                  <a:srgbClr val="000066"/>
+                </a:solidFill>
+                <a:latin typeface="Microsoft JhengHei" panose="020B0604030504040204" pitchFamily="34" charset="-120"/>
+                <a:ea typeface="Microsoft JhengHei" panose="020B0604030504040204" pitchFamily="34" charset="-120"/>
+              </a:rPr>
+              <a:t> )</a:t>
+            </a:r>
+            <a:endParaRPr lang="vi-VN" sz="3733" b="1" dirty="0">
+              <a:solidFill>
+                <a:srgbClr val="000066"/>
+              </a:solidFill>
+              <a:ea typeface="Microsoft JhengHei" panose="020B0604030504040204" pitchFamily="34" charset="-120"/>
+            </a:endParaRPr>
+          </a:p>
+        </p:txBody>
+      </p:sp>
     </p:spTree>
     <p:extLst>
       <p:ext uri="{BB962C8B-B14F-4D97-AF65-F5344CB8AC3E}">
@@ -3417,6 +3449,74 @@
           </a:p>
         </p:txBody>
       </p:sp>
+      <p:sp>
+        <p:nvSpPr>
+          <p:cNvPr id="2" name="TextBox 1">
+            <a:extLst>
+              <a:ext uri="{FF2B5EF4-FFF2-40B4-BE49-F238E27FC236}">
+                <a16:creationId xmlns:a16="http://schemas.microsoft.com/office/drawing/2014/main" id="{EF4ACEE9-98A2-F504-FE28-D475846BF67F}"/>
+              </a:ext>
+            </a:extLst>
+          </p:cNvPr>
+          <p:cNvSpPr txBox="1"/>
+          <p:nvPr/>
+        </p:nvSpPr>
+        <p:spPr>
+          <a:xfrm>
+            <a:off x="0" y="5157192"/>
+            <a:ext cx="12192000" cy="666786"/>
+          </a:xfrm>
+          <a:prstGeom prst="rect">
+            <a:avLst/>
+          </a:prstGeom>
+          <a:noFill/>
+        </p:spPr>
+        <p:txBody>
+          <a:bodyPr wrap="square" rtlCol="0">
+            <a:spAutoFit/>
+          </a:bodyPr>
+          <a:lstStyle/>
+          <a:p>
+            <a:pPr algn="ctr"/>
+            <a:r>
+              <a:rPr lang="en-US" sz="3733" b="1" dirty="0">
+                <a:solidFill>
+                  <a:srgbClr val="000066"/>
+                </a:solidFill>
+                <a:latin typeface="Microsoft JhengHei" panose="020B0604030504040204" pitchFamily="34" charset="-120"/>
+                <a:ea typeface="Microsoft JhengHei" panose="020B0604030504040204" pitchFamily="34" charset="-120"/>
+              </a:rPr>
+              <a:t>( </a:t>
+            </a:r>
+            <a:r>
+              <a:rPr lang="zh-CN" altLang="en-US" sz="3733" b="1" dirty="0">
+                <a:solidFill>
+                  <a:srgbClr val="000066"/>
+                </a:solidFill>
+                <a:latin typeface="Microsoft JhengHei" panose="020B0604030504040204" pitchFamily="34" charset="-120"/>
+                <a:ea typeface="Microsoft JhengHei" panose="020B0604030504040204" pitchFamily="34" charset="-120"/>
+              </a:rPr>
+              <a:t>正歌</a:t>
+            </a:r>
+            <a:r>
+              <a:rPr lang="en-US" sz="3733" b="1" dirty="0">
+                <a:solidFill>
+                  <a:srgbClr val="000066"/>
+                </a:solidFill>
+                <a:latin typeface="Microsoft JhengHei" panose="020B0604030504040204" pitchFamily="34" charset="-120"/>
+                <a:ea typeface="Microsoft JhengHei" panose="020B0604030504040204" pitchFamily="34" charset="-120"/>
+              </a:rPr>
+              <a:t> )</a:t>
+            </a:r>
+            <a:endParaRPr lang="vi-VN" sz="3733" b="1" dirty="0">
+              <a:solidFill>
+                <a:srgbClr val="000066"/>
+              </a:solidFill>
+              <a:ea typeface="Microsoft JhengHei" panose="020B0604030504040204" pitchFamily="34" charset="-120"/>
+            </a:endParaRPr>
+          </a:p>
+        </p:txBody>
+      </p:sp>
     </p:spTree>
     <p:extLst>
       <p:ext uri="{BB962C8B-B14F-4D97-AF65-F5344CB8AC3E}">
@@ -3536,6 +3636,74 @@
           </a:p>
         </p:txBody>
       </p:sp>
+      <p:sp>
+        <p:nvSpPr>
+          <p:cNvPr id="2" name="TextBox 1">
+            <a:extLst>
+              <a:ext uri="{FF2B5EF4-FFF2-40B4-BE49-F238E27FC236}">
+                <a16:creationId xmlns:a16="http://schemas.microsoft.com/office/drawing/2014/main" id="{69C1C930-1F4B-4DF3-29C2-475B57C425A8}"/>
+              </a:ext>
+            </a:extLst>
+          </p:cNvPr>
+          <p:cNvSpPr txBox="1"/>
+          <p:nvPr/>
+        </p:nvSpPr>
+        <p:spPr>
+          <a:xfrm>
+            <a:off x="0" y="5157192"/>
+            <a:ext cx="12192000" cy="666786"/>
+          </a:xfrm>
+          <a:prstGeom prst="rect">
+            <a:avLst/>
+          </a:prstGeom>
+          <a:noFill/>
+        </p:spPr>
+        <p:txBody>
+          <a:bodyPr wrap="square" rtlCol="0">
+            <a:spAutoFit/>
+          </a:bodyPr>
+          <a:lstStyle/>
+          <a:p>
+            <a:pPr algn="ctr"/>
+            <a:r>
+              <a:rPr lang="en-US" sz="3733" b="1" dirty="0">
+                <a:solidFill>
+                  <a:srgbClr val="000066"/>
+                </a:solidFill>
+                <a:latin typeface="Microsoft JhengHei" panose="020B0604030504040204" pitchFamily="34" charset="-120"/>
+                <a:ea typeface="Microsoft JhengHei" panose="020B0604030504040204" pitchFamily="34" charset="-120"/>
+              </a:rPr>
+              <a:t>( </a:t>
+            </a:r>
+            <a:r>
+              <a:rPr lang="zh-CN" altLang="en-US" sz="3733" b="1" dirty="0">
+                <a:solidFill>
+                  <a:srgbClr val="000066"/>
+                </a:solidFill>
+                <a:latin typeface="Microsoft JhengHei" panose="020B0604030504040204" pitchFamily="34" charset="-120"/>
+                <a:ea typeface="Microsoft JhengHei" panose="020B0604030504040204" pitchFamily="34" charset="-120"/>
+              </a:rPr>
+              <a:t>副歌</a:t>
+            </a:r>
+            <a:r>
+              <a:rPr lang="en-US" sz="3733" b="1" dirty="0">
+                <a:solidFill>
+                  <a:srgbClr val="000066"/>
+                </a:solidFill>
+                <a:latin typeface="Microsoft JhengHei" panose="020B0604030504040204" pitchFamily="34" charset="-120"/>
+                <a:ea typeface="Microsoft JhengHei" panose="020B0604030504040204" pitchFamily="34" charset="-120"/>
+              </a:rPr>
+              <a:t> )</a:t>
+            </a:r>
+            <a:endParaRPr lang="vi-VN" sz="3733" b="1" dirty="0">
+              <a:solidFill>
+                <a:srgbClr val="000066"/>
+              </a:solidFill>
+              <a:ea typeface="Microsoft JhengHei" panose="020B0604030504040204" pitchFamily="34" charset="-120"/>
+            </a:endParaRPr>
+          </a:p>
+        </p:txBody>
+      </p:sp>
     </p:spTree>
     <p:extLst>
       <p:ext uri="{BB962C8B-B14F-4D97-AF65-F5344CB8AC3E}">
@@ -3653,6 +3821,74 @@
           </a:p>
         </p:txBody>
       </p:sp>
+      <p:sp>
+        <p:nvSpPr>
+          <p:cNvPr id="2" name="TextBox 1">
+            <a:extLst>
+              <a:ext uri="{FF2B5EF4-FFF2-40B4-BE49-F238E27FC236}">
+                <a16:creationId xmlns:a16="http://schemas.microsoft.com/office/drawing/2014/main" id="{80EDBD2A-C343-7C7C-1201-D98D88C6A523}"/>
+              </a:ext>
+            </a:extLst>
+          </p:cNvPr>
+          <p:cNvSpPr txBox="1"/>
+          <p:nvPr/>
+        </p:nvSpPr>
+        <p:spPr>
+          <a:xfrm>
+            <a:off x="0" y="5157192"/>
+            <a:ext cx="12192000" cy="666786"/>
+          </a:xfrm>
+          <a:prstGeom prst="rect">
+            <a:avLst/>
+          </a:prstGeom>
+          <a:noFill/>
+        </p:spPr>
+        <p:txBody>
+          <a:bodyPr wrap="square" rtlCol="0">
+            <a:spAutoFit/>
+          </a:bodyPr>
+          <a:lstStyle/>
+          <a:p>
+            <a:pPr algn="ctr"/>
+            <a:r>
+              <a:rPr lang="en-US" sz="3733" b="1" dirty="0">
+                <a:solidFill>
+                  <a:srgbClr val="000066"/>
+                </a:solidFill>
+                <a:latin typeface="Microsoft JhengHei" panose="020B0604030504040204" pitchFamily="34" charset="-120"/>
+                <a:ea typeface="Microsoft JhengHei" panose="020B0604030504040204" pitchFamily="34" charset="-120"/>
+              </a:rPr>
+              <a:t>( </a:t>
+            </a:r>
+            <a:r>
+              <a:rPr lang="zh-CN" altLang="en-US" sz="3733" b="1" dirty="0">
+                <a:solidFill>
+                  <a:srgbClr val="000066"/>
+                </a:solidFill>
+                <a:latin typeface="Microsoft JhengHei" panose="020B0604030504040204" pitchFamily="34" charset="-120"/>
+                <a:ea typeface="Microsoft JhengHei" panose="020B0604030504040204" pitchFamily="34" charset="-120"/>
+              </a:rPr>
+              <a:t>副歌</a:t>
+            </a:r>
+            <a:r>
+              <a:rPr lang="en-US" sz="3733" b="1" dirty="0">
+                <a:solidFill>
+                  <a:srgbClr val="000066"/>
+                </a:solidFill>
+                <a:latin typeface="Microsoft JhengHei" panose="020B0604030504040204" pitchFamily="34" charset="-120"/>
+                <a:ea typeface="Microsoft JhengHei" panose="020B0604030504040204" pitchFamily="34" charset="-120"/>
+              </a:rPr>
+              <a:t> )</a:t>
+            </a:r>
+            <a:endParaRPr lang="vi-VN" sz="3733" b="1" dirty="0">
+              <a:solidFill>
+                <a:srgbClr val="000066"/>
+              </a:solidFill>
+              <a:ea typeface="Microsoft JhengHei" panose="020B0604030504040204" pitchFamily="34" charset="-120"/>
+            </a:endParaRPr>
+          </a:p>
+        </p:txBody>
+      </p:sp>
     </p:spTree>
     <p:extLst>
       <p:ext uri="{BB962C8B-B14F-4D97-AF65-F5344CB8AC3E}">
@@ -3778,7 +4014,7 @@
                 <a:latin typeface="Microsoft JhengHei" panose="020B0604030504040204" pitchFamily="34" charset="-120"/>
                 <a:ea typeface="Microsoft JhengHei" panose="020B0604030504040204" pitchFamily="34" charset="-120"/>
               </a:rPr>
-              <a:t>袮</a:t>
+              <a:t>你</a:t>
             </a:r>
             <a:r>
               <a:rPr lang="zh-TW" altLang="en-US" sz="6400" b="1" dirty="0">
@@ -3795,6 +4031,74 @@
                 <a:srgbClr val="000066"/>
               </a:solidFill>
               <a:latin typeface="Microsoft JhengHei" panose="020B0604030504040204" pitchFamily="34" charset="-120"/>
+              <a:ea typeface="Microsoft JhengHei" panose="020B0604030504040204" pitchFamily="34" charset="-120"/>
+            </a:endParaRPr>
+          </a:p>
+        </p:txBody>
+      </p:sp>
+      <p:sp>
+        <p:nvSpPr>
+          <p:cNvPr id="2" name="TextBox 1">
+            <a:extLst>
+              <a:ext uri="{FF2B5EF4-FFF2-40B4-BE49-F238E27FC236}">
+                <a16:creationId xmlns:a16="http://schemas.microsoft.com/office/drawing/2014/main" id="{782E6D42-5558-D14C-AF6E-8ED6693055CC}"/>
+              </a:ext>
+            </a:extLst>
+          </p:cNvPr>
+          <p:cNvSpPr txBox="1"/>
+          <p:nvPr/>
+        </p:nvSpPr>
+        <p:spPr>
+          <a:xfrm>
+            <a:off x="0" y="5157192"/>
+            <a:ext cx="12192000" cy="666786"/>
+          </a:xfrm>
+          <a:prstGeom prst="rect">
+            <a:avLst/>
+          </a:prstGeom>
+          <a:noFill/>
+        </p:spPr>
+        <p:txBody>
+          <a:bodyPr wrap="square" rtlCol="0">
+            <a:spAutoFit/>
+          </a:bodyPr>
+          <a:lstStyle/>
+          <a:p>
+            <a:pPr algn="ctr"/>
+            <a:r>
+              <a:rPr lang="en-US" sz="3733" b="1" dirty="0">
+                <a:solidFill>
+                  <a:srgbClr val="000066"/>
+                </a:solidFill>
+                <a:latin typeface="Microsoft JhengHei" panose="020B0604030504040204" pitchFamily="34" charset="-120"/>
+                <a:ea typeface="Microsoft JhengHei" panose="020B0604030504040204" pitchFamily="34" charset="-120"/>
+              </a:rPr>
+              <a:t>( </a:t>
+            </a:r>
+            <a:r>
+              <a:rPr lang="zh-CN" altLang="en-US" sz="3733" b="1" dirty="0">
+                <a:solidFill>
+                  <a:srgbClr val="000066"/>
+                </a:solidFill>
+                <a:latin typeface="Microsoft JhengHei" panose="020B0604030504040204" pitchFamily="34" charset="-120"/>
+                <a:ea typeface="Microsoft JhengHei" panose="020B0604030504040204" pitchFamily="34" charset="-120"/>
+              </a:rPr>
+              <a:t>橋</a:t>
+            </a:r>
+            <a:r>
+              <a:rPr lang="en-US" sz="3733" b="1" dirty="0">
+                <a:solidFill>
+                  <a:srgbClr val="000066"/>
+                </a:solidFill>
+                <a:latin typeface="Microsoft JhengHei" panose="020B0604030504040204" pitchFamily="34" charset="-120"/>
+                <a:ea typeface="Microsoft JhengHei" panose="020B0604030504040204" pitchFamily="34" charset="-120"/>
+              </a:rPr>
+              <a:t> )</a:t>
+            </a:r>
+            <a:endParaRPr lang="vi-VN" sz="3733" b="1" dirty="0">
+              <a:solidFill>
+                <a:srgbClr val="000066"/>
+              </a:solidFill>
               <a:ea typeface="Microsoft JhengHei" panose="020B0604030504040204" pitchFamily="34" charset="-120"/>
             </a:endParaRPr>
           </a:p>
@@ -3875,6 +4179,74 @@
           </a:p>
         </p:txBody>
       </p:sp>
+      <p:sp>
+        <p:nvSpPr>
+          <p:cNvPr id="2" name="TextBox 1">
+            <a:extLst>
+              <a:ext uri="{FF2B5EF4-FFF2-40B4-BE49-F238E27FC236}">
+                <a16:creationId xmlns:a16="http://schemas.microsoft.com/office/drawing/2014/main" id="{8CE8FAED-B84E-99CB-08B8-DB77F99FE171}"/>
+              </a:ext>
+            </a:extLst>
+          </p:cNvPr>
+          <p:cNvSpPr txBox="1"/>
+          <p:nvPr/>
+        </p:nvSpPr>
+        <p:spPr>
+          <a:xfrm>
+            <a:off x="0" y="5157192"/>
+            <a:ext cx="12192000" cy="666786"/>
+          </a:xfrm>
+          <a:prstGeom prst="rect">
+            <a:avLst/>
+          </a:prstGeom>
+          <a:noFill/>
+        </p:spPr>
+        <p:txBody>
+          <a:bodyPr wrap="square" rtlCol="0">
+            <a:spAutoFit/>
+          </a:bodyPr>
+          <a:lstStyle/>
+          <a:p>
+            <a:pPr algn="ctr"/>
+            <a:r>
+              <a:rPr lang="en-US" sz="3733" b="1" dirty="0">
+                <a:solidFill>
+                  <a:srgbClr val="000066"/>
+                </a:solidFill>
+                <a:latin typeface="Microsoft JhengHei" panose="020B0604030504040204" pitchFamily="34" charset="-120"/>
+                <a:ea typeface="Microsoft JhengHei" panose="020B0604030504040204" pitchFamily="34" charset="-120"/>
+              </a:rPr>
+              <a:t>( </a:t>
+            </a:r>
+            <a:r>
+              <a:rPr lang="zh-CN" altLang="en-US" sz="3733" b="1" dirty="0">
+                <a:solidFill>
+                  <a:srgbClr val="000066"/>
+                </a:solidFill>
+                <a:latin typeface="Microsoft JhengHei" panose="020B0604030504040204" pitchFamily="34" charset="-120"/>
+                <a:ea typeface="Microsoft JhengHei" panose="020B0604030504040204" pitchFamily="34" charset="-120"/>
+              </a:rPr>
+              <a:t>橋</a:t>
+            </a:r>
+            <a:r>
+              <a:rPr lang="en-US" sz="3733" b="1" dirty="0">
+                <a:solidFill>
+                  <a:srgbClr val="000066"/>
+                </a:solidFill>
+                <a:latin typeface="Microsoft JhengHei" panose="020B0604030504040204" pitchFamily="34" charset="-120"/>
+                <a:ea typeface="Microsoft JhengHei" panose="020B0604030504040204" pitchFamily="34" charset="-120"/>
+              </a:rPr>
+              <a:t> )</a:t>
+            </a:r>
+            <a:endParaRPr lang="vi-VN" sz="3733" b="1" dirty="0">
+              <a:solidFill>
+                <a:srgbClr val="000066"/>
+              </a:solidFill>
+              <a:ea typeface="Microsoft JhengHei" panose="020B0604030504040204" pitchFamily="34" charset="-120"/>
+            </a:endParaRPr>
+          </a:p>
+        </p:txBody>
+      </p:sp>
     </p:spTree>
     <p:extLst>
       <p:ext uri="{BB962C8B-B14F-4D97-AF65-F5344CB8AC3E}">
@@ -4012,6 +4384,74 @@
           </a:p>
         </p:txBody>
       </p:sp>
+      <p:sp>
+        <p:nvSpPr>
+          <p:cNvPr id="2" name="TextBox 1">
+            <a:extLst>
+              <a:ext uri="{FF2B5EF4-FFF2-40B4-BE49-F238E27FC236}">
+                <a16:creationId xmlns:a16="http://schemas.microsoft.com/office/drawing/2014/main" id="{613BF5DF-A9BF-11D0-A4B4-960409ECCC7D}"/>
+              </a:ext>
+            </a:extLst>
+          </p:cNvPr>
+          <p:cNvSpPr txBox="1"/>
+          <p:nvPr/>
+        </p:nvSpPr>
+        <p:spPr>
+          <a:xfrm>
+            <a:off x="0" y="5157192"/>
+            <a:ext cx="12192000" cy="666786"/>
+          </a:xfrm>
+          <a:prstGeom prst="rect">
+            <a:avLst/>
+          </a:prstGeom>
+          <a:noFill/>
+        </p:spPr>
+        <p:txBody>
+          <a:bodyPr wrap="square" rtlCol="0">
+            <a:spAutoFit/>
+          </a:bodyPr>
+          <a:lstStyle/>
+          <a:p>
+            <a:pPr algn="ctr"/>
+            <a:r>
+              <a:rPr lang="en-US" sz="3733" b="1" dirty="0">
+                <a:solidFill>
+                  <a:srgbClr val="000066"/>
+                </a:solidFill>
+                <a:latin typeface="Microsoft JhengHei" panose="020B0604030504040204" pitchFamily="34" charset="-120"/>
+                <a:ea typeface="Microsoft JhengHei" panose="020B0604030504040204" pitchFamily="34" charset="-120"/>
+              </a:rPr>
+              <a:t>( </a:t>
+            </a:r>
+            <a:r>
+              <a:rPr lang="zh-CN" altLang="en-US" sz="3733" b="1" dirty="0">
+                <a:solidFill>
+                  <a:srgbClr val="000066"/>
+                </a:solidFill>
+                <a:latin typeface="Microsoft JhengHei" panose="020B0604030504040204" pitchFamily="34" charset="-120"/>
+                <a:ea typeface="Microsoft JhengHei" panose="020B0604030504040204" pitchFamily="34" charset="-120"/>
+              </a:rPr>
+              <a:t>橋</a:t>
+            </a:r>
+            <a:r>
+              <a:rPr lang="en-US" sz="3733" b="1" dirty="0">
+                <a:solidFill>
+                  <a:srgbClr val="000066"/>
+                </a:solidFill>
+                <a:latin typeface="Microsoft JhengHei" panose="020B0604030504040204" pitchFamily="34" charset="-120"/>
+                <a:ea typeface="Microsoft JhengHei" panose="020B0604030504040204" pitchFamily="34" charset="-120"/>
+              </a:rPr>
+              <a:t> )</a:t>
+            </a:r>
+            <a:endParaRPr lang="vi-VN" sz="3733" b="1" dirty="0">
+              <a:solidFill>
+                <a:srgbClr val="000066"/>
+              </a:solidFill>
+              <a:ea typeface="Microsoft JhengHei" panose="020B0604030504040204" pitchFamily="34" charset="-120"/>
+            </a:endParaRPr>
+          </a:p>
+        </p:txBody>
+      </p:sp>
     </p:spTree>
     <p:extLst>
       <p:ext uri="{BB962C8B-B14F-4D97-AF65-F5344CB8AC3E}">
@@ -4102,6 +4542,74 @@
                 <a:srgbClr val="000066"/>
               </a:solidFill>
               <a:latin typeface="Microsoft JhengHei" panose="020B0604030504040204" pitchFamily="34" charset="-120"/>
+              <a:ea typeface="Microsoft JhengHei" panose="020B0604030504040204" pitchFamily="34" charset="-120"/>
+            </a:endParaRPr>
+          </a:p>
+        </p:txBody>
+      </p:sp>
+      <p:sp>
+        <p:nvSpPr>
+          <p:cNvPr id="2" name="TextBox 1">
+            <a:extLst>
+              <a:ext uri="{FF2B5EF4-FFF2-40B4-BE49-F238E27FC236}">
+                <a16:creationId xmlns:a16="http://schemas.microsoft.com/office/drawing/2014/main" id="{AB66B597-27A4-3B3F-ADA1-655E37B46F47}"/>
+              </a:ext>
+            </a:extLst>
+          </p:cNvPr>
+          <p:cNvSpPr txBox="1"/>
+          <p:nvPr/>
+        </p:nvSpPr>
+        <p:spPr>
+          <a:xfrm>
+            <a:off x="0" y="5157192"/>
+            <a:ext cx="12192000" cy="666786"/>
+          </a:xfrm>
+          <a:prstGeom prst="rect">
+            <a:avLst/>
+          </a:prstGeom>
+          <a:noFill/>
+        </p:spPr>
+        <p:txBody>
+          <a:bodyPr wrap="square" rtlCol="0">
+            <a:spAutoFit/>
+          </a:bodyPr>
+          <a:lstStyle/>
+          <a:p>
+            <a:pPr algn="ctr"/>
+            <a:r>
+              <a:rPr lang="en-US" sz="3733" b="1" dirty="0">
+                <a:solidFill>
+                  <a:srgbClr val="000066"/>
+                </a:solidFill>
+                <a:latin typeface="Microsoft JhengHei" panose="020B0604030504040204" pitchFamily="34" charset="-120"/>
+                <a:ea typeface="Microsoft JhengHei" panose="020B0604030504040204" pitchFamily="34" charset="-120"/>
+              </a:rPr>
+              <a:t>( </a:t>
+            </a:r>
+            <a:r>
+              <a:rPr lang="zh-CN" altLang="en-US" sz="3733" b="1" dirty="0">
+                <a:solidFill>
+                  <a:srgbClr val="000066"/>
+                </a:solidFill>
+                <a:latin typeface="Microsoft JhengHei" panose="020B0604030504040204" pitchFamily="34" charset="-120"/>
+                <a:ea typeface="Microsoft JhengHei" panose="020B0604030504040204" pitchFamily="34" charset="-120"/>
+              </a:rPr>
+              <a:t>橋</a:t>
+            </a:r>
+            <a:r>
+              <a:rPr lang="en-US" sz="3733" b="1" dirty="0">
+                <a:solidFill>
+                  <a:srgbClr val="000066"/>
+                </a:solidFill>
+                <a:latin typeface="Microsoft JhengHei" panose="020B0604030504040204" pitchFamily="34" charset="-120"/>
+                <a:ea typeface="Microsoft JhengHei" panose="020B0604030504040204" pitchFamily="34" charset="-120"/>
+              </a:rPr>
+              <a:t> )</a:t>
+            </a:r>
+            <a:endParaRPr lang="vi-VN" sz="3733" b="1" dirty="0">
+              <a:solidFill>
+                <a:srgbClr val="000066"/>
+              </a:solidFill>
               <a:ea typeface="Microsoft JhengHei" panose="020B0604030504040204" pitchFamily="34" charset="-120"/>
             </a:endParaRPr>
           </a:p>
